--- a/TGT_DEMO_pitchbook.pptx
+++ b/TGT_DEMO_pitchbook.pptx
@@ -3503,7 +3503,7 @@
                 </a:solidFill>
                 <a:latin typeface="Arial"/>
               </a:rPr>
-              <a:t>September 2026  |  Draft, illustrative and for discussion purposes only</a:t>
+              <a:t>May 2026  |  Draft, illustrative and for discussion purposes only</a:t>
             </a:r>
           </a:p>
         </p:txBody>

--- a/TGT_DEMO_pitchbook.pptx
+++ b/TGT_DEMO_pitchbook.pptx
@@ -17922,7 +17922,7 @@
                 </a:solidFill>
                 <a:latin typeface="Arial"/>
               </a:rPr>
-              <a:t>Current share price: $20.00. Highlighted row = base-case WACC.</a:t>
+              <a:t>Current share price: $20.00. Highlighted row = base-case WACC. Exit grid at multiples rounded to 0.1x; at the exact base-case multiple (10.62x) the value is $19.64.</a:t>
             </a:r>
           </a:p>
         </p:txBody>
